--- a/1.8 Transport Layer/1.8 Transport Layer.pptx
+++ b/1.8 Transport Layer/1.8 Transport Layer.pptx
@@ -9,6 +9,8 @@
     <p:sldId id="257" r:id="rId3"/>
     <p:sldId id="258" r:id="rId4"/>
     <p:sldId id="259" r:id="rId5"/>
+    <p:sldId id="260" r:id="rId6"/>
+    <p:sldId id="261" r:id="rId7"/>
   </p:sldIdLst>
   <p:sldSz cx="12192000" cy="6858000"/>
   <p:notesSz cx="6858000" cy="9144000"/>
@@ -257,7 +259,7 @@
           <a:p>
             <a:fld id="{F3DF6F99-26EF-44A0-AB0C-04C766CF99AB}" type="datetimeFigureOut">
               <a:rPr lang="ru-RU" smtClean="0"/>
-              <a:t>31.08.2026</a:t>
+              <a:t>01.09.2026</a:t>
             </a:fld>
             <a:endParaRPr lang="ru-RU"/>
           </a:p>
@@ -427,7 +429,7 @@
           <a:p>
             <a:fld id="{F3DF6F99-26EF-44A0-AB0C-04C766CF99AB}" type="datetimeFigureOut">
               <a:rPr lang="ru-RU" smtClean="0"/>
-              <a:t>31.08.2026</a:t>
+              <a:t>01.09.2026</a:t>
             </a:fld>
             <a:endParaRPr lang="ru-RU"/>
           </a:p>
@@ -607,7 +609,7 @@
           <a:p>
             <a:fld id="{F3DF6F99-26EF-44A0-AB0C-04C766CF99AB}" type="datetimeFigureOut">
               <a:rPr lang="ru-RU" smtClean="0"/>
-              <a:t>31.08.2026</a:t>
+              <a:t>01.09.2026</a:t>
             </a:fld>
             <a:endParaRPr lang="ru-RU"/>
           </a:p>
@@ -777,7 +779,7 @@
           <a:p>
             <a:fld id="{F3DF6F99-26EF-44A0-AB0C-04C766CF99AB}" type="datetimeFigureOut">
               <a:rPr lang="ru-RU" smtClean="0"/>
-              <a:t>31.08.2026</a:t>
+              <a:t>01.09.2026</a:t>
             </a:fld>
             <a:endParaRPr lang="ru-RU"/>
           </a:p>
@@ -1023,7 +1025,7 @@
           <a:p>
             <a:fld id="{F3DF6F99-26EF-44A0-AB0C-04C766CF99AB}" type="datetimeFigureOut">
               <a:rPr lang="ru-RU" smtClean="0"/>
-              <a:t>31.08.2026</a:t>
+              <a:t>01.09.2026</a:t>
             </a:fld>
             <a:endParaRPr lang="ru-RU"/>
           </a:p>
@@ -1255,7 +1257,7 @@
           <a:p>
             <a:fld id="{F3DF6F99-26EF-44A0-AB0C-04C766CF99AB}" type="datetimeFigureOut">
               <a:rPr lang="ru-RU" smtClean="0"/>
-              <a:t>31.08.2026</a:t>
+              <a:t>01.09.2026</a:t>
             </a:fld>
             <a:endParaRPr lang="ru-RU"/>
           </a:p>
@@ -1622,7 +1624,7 @@
           <a:p>
             <a:fld id="{F3DF6F99-26EF-44A0-AB0C-04C766CF99AB}" type="datetimeFigureOut">
               <a:rPr lang="ru-RU" smtClean="0"/>
-              <a:t>31.08.2026</a:t>
+              <a:t>01.09.2026</a:t>
             </a:fld>
             <a:endParaRPr lang="ru-RU"/>
           </a:p>
@@ -1740,7 +1742,7 @@
           <a:p>
             <a:fld id="{F3DF6F99-26EF-44A0-AB0C-04C766CF99AB}" type="datetimeFigureOut">
               <a:rPr lang="ru-RU" smtClean="0"/>
-              <a:t>31.08.2026</a:t>
+              <a:t>01.09.2026</a:t>
             </a:fld>
             <a:endParaRPr lang="ru-RU"/>
           </a:p>
@@ -1835,7 +1837,7 @@
           <a:p>
             <a:fld id="{F3DF6F99-26EF-44A0-AB0C-04C766CF99AB}" type="datetimeFigureOut">
               <a:rPr lang="ru-RU" smtClean="0"/>
-              <a:t>31.08.2026</a:t>
+              <a:t>01.09.2026</a:t>
             </a:fld>
             <a:endParaRPr lang="ru-RU"/>
           </a:p>
@@ -2112,7 +2114,7 @@
           <a:p>
             <a:fld id="{F3DF6F99-26EF-44A0-AB0C-04C766CF99AB}" type="datetimeFigureOut">
               <a:rPr lang="ru-RU" smtClean="0"/>
-              <a:t>31.08.2026</a:t>
+              <a:t>01.09.2026</a:t>
             </a:fld>
             <a:endParaRPr lang="ru-RU"/>
           </a:p>
@@ -2365,7 +2367,7 @@
           <a:p>
             <a:fld id="{F3DF6F99-26EF-44A0-AB0C-04C766CF99AB}" type="datetimeFigureOut">
               <a:rPr lang="ru-RU" smtClean="0"/>
-              <a:t>31.08.2026</a:t>
+              <a:t>01.09.2026</a:t>
             </a:fld>
             <a:endParaRPr lang="ru-RU"/>
           </a:p>
@@ -2578,7 +2580,7 @@
           <a:p>
             <a:fld id="{F3DF6F99-26EF-44A0-AB0C-04C766CF99AB}" type="datetimeFigureOut">
               <a:rPr lang="ru-RU" smtClean="0"/>
-              <a:t>31.08.2026</a:t>
+              <a:t>01.09.2026</a:t>
             </a:fld>
             <a:endParaRPr lang="ru-RU"/>
           </a:p>
@@ -3335,26 +3337,87 @@
           <a:bodyPr/>
           <a:lstStyle/>
           <a:p>
-            <a:endParaRPr lang="ru-RU"/>
-          </a:p>
-        </p:txBody>
-      </p:sp>
-      <p:sp>
-        <p:nvSpPr>
-          <p:cNvPr id="3" name="Объект 2"/>
-          <p:cNvSpPr>
-            <a:spLocks noGrp="1"/>
-          </p:cNvSpPr>
-          <p:nvPr>
-            <p:ph idx="1"/>
-          </p:nvPr>
-        </p:nvSpPr>
-        <p:spPr/>
-        <p:txBody>
-          <a:bodyPr/>
-          <a:lstStyle/>
-          <a:p>
-            <a:endParaRPr lang="ru-RU"/>
+            <a:r>
+              <a:rPr lang="en-US" dirty="0" smtClean="0"/>
+              <a:t>TCP, </a:t>
+            </a:r>
+            <a:r>
+              <a:rPr lang="ru-RU" dirty="0" smtClean="0"/>
+              <a:t>общие сведения </a:t>
+            </a:r>
+            <a:endParaRPr lang="ru-RU" dirty="0"/>
+          </a:p>
+        </p:txBody>
+      </p:sp>
+      <p:pic>
+        <p:nvPicPr>
+          <p:cNvPr id="4" name="Объект 3"/>
+          <p:cNvPicPr>
+            <a:picLocks noGrp="1" noChangeAspect="1"/>
+          </p:cNvPicPr>
+          <p:nvPr>
+            <p:ph sz="half" idx="1"/>
+          </p:nvPr>
+        </p:nvPicPr>
+        <p:blipFill>
+          <a:blip r:embed="rId2"/>
+          <a:stretch>
+            <a:fillRect/>
+          </a:stretch>
+        </p:blipFill>
+        <p:spPr>
+          <a:xfrm>
+            <a:off x="1099712" y="1825625"/>
+            <a:ext cx="4658575" cy="4351338"/>
+          </a:xfrm>
+          <a:prstGeom prst="rect">
+            <a:avLst/>
+          </a:prstGeom>
+        </p:spPr>
+      </p:pic>
+      <p:sp>
+        <p:nvSpPr>
+          <p:cNvPr id="5" name="Объект 4"/>
+          <p:cNvSpPr>
+            <a:spLocks noGrp="1"/>
+          </p:cNvSpPr>
+          <p:nvPr>
+            <p:ph sz="half" idx="2"/>
+          </p:nvPr>
+        </p:nvSpPr>
+        <p:spPr>
+          <a:xfrm>
+            <a:off x="6172200" y="2643310"/>
+            <a:ext cx="5181600" cy="2860675"/>
+          </a:xfrm>
+        </p:spPr>
+        <p:txBody>
+          <a:bodyPr/>
+          <a:lstStyle/>
+          <a:p>
+            <a:r>
+              <a:rPr lang="ru-RU" dirty="0" smtClean="0"/>
+              <a:t>Каналы с установлением соединения</a:t>
+            </a:r>
+          </a:p>
+          <a:p>
+            <a:r>
+              <a:rPr lang="ru-RU" dirty="0" smtClean="0"/>
+              <a:t>Надежная доставка</a:t>
+            </a:r>
+          </a:p>
+          <a:p>
+            <a:r>
+              <a:rPr lang="ru-RU" dirty="0" smtClean="0"/>
+              <a:t>Восстановление последовательности данных</a:t>
+            </a:r>
+          </a:p>
+          <a:p>
+            <a:r>
+              <a:rPr lang="ru-RU" dirty="0" smtClean="0"/>
+              <a:t>Управление потоком</a:t>
+            </a:r>
+            <a:endParaRPr lang="ru-RU" dirty="0"/>
           </a:p>
         </p:txBody>
       </p:sp>
@@ -3362,6 +3425,252 @@
     <p:extLst>
       <p:ext uri="{BB962C8B-B14F-4D97-AF65-F5344CB8AC3E}">
         <p14:creationId xmlns:p14="http://schemas.microsoft.com/office/powerpoint/2010/main" val="307126637"/>
+      </p:ext>
+    </p:extLst>
+  </p:cSld>
+  <p:clrMapOvr>
+    <a:masterClrMapping/>
+  </p:clrMapOvr>
+</p:sld>
+</file>
+
+<file path=ppt/slides/slide5.xml><?xml version="1.0" encoding="utf-8"?>
+<p:sld xmlns:a="http://schemas.openxmlformats.org/drawingml/2006/main" xmlns:r="http://schemas.openxmlformats.org/officeDocument/2006/relationships" xmlns:p="http://schemas.openxmlformats.org/presentationml/2006/main">
+  <p:cSld>
+    <p:spTree>
+      <p:nvGrpSpPr>
+        <p:cNvPr id="1" name=""/>
+        <p:cNvGrpSpPr/>
+        <p:nvPr/>
+      </p:nvGrpSpPr>
+      <p:grpSpPr>
+        <a:xfrm>
+          <a:off x="0" y="0"/>
+          <a:ext cx="0" cy="0"/>
+          <a:chOff x="0" y="0"/>
+          <a:chExt cx="0" cy="0"/>
+        </a:xfrm>
+      </p:grpSpPr>
+      <p:sp>
+        <p:nvSpPr>
+          <p:cNvPr id="2" name="Заголовок 1"/>
+          <p:cNvSpPr>
+            <a:spLocks noGrp="1"/>
+          </p:cNvSpPr>
+          <p:nvPr>
+            <p:ph type="title"/>
+          </p:nvPr>
+        </p:nvSpPr>
+        <p:spPr/>
+        <p:txBody>
+          <a:bodyPr/>
+          <a:lstStyle/>
+          <a:p>
+            <a:r>
+              <a:rPr lang="en-US" dirty="0" smtClean="0"/>
+              <a:t>UDP, </a:t>
+            </a:r>
+            <a:r>
+              <a:rPr lang="ru-RU" dirty="0" smtClean="0"/>
+              <a:t>общие сведения</a:t>
+            </a:r>
+            <a:endParaRPr lang="ru-RU" dirty="0"/>
+          </a:p>
+        </p:txBody>
+      </p:sp>
+      <p:sp>
+        <p:nvSpPr>
+          <p:cNvPr id="3" name="Объект 2"/>
+          <p:cNvSpPr>
+            <a:spLocks noGrp="1"/>
+          </p:cNvSpPr>
+          <p:nvPr>
+            <p:ph sz="half" idx="1"/>
+          </p:nvPr>
+        </p:nvSpPr>
+        <p:spPr>
+          <a:xfrm>
+            <a:off x="776654" y="2698444"/>
+            <a:ext cx="5181600" cy="2605698"/>
+          </a:xfrm>
+        </p:spPr>
+        <p:txBody>
+          <a:bodyPr/>
+          <a:lstStyle/>
+          <a:p>
+            <a:r>
+              <a:rPr lang="ru-RU" dirty="0"/>
+              <a:t>Без установления </a:t>
+            </a:r>
+            <a:r>
+              <a:rPr lang="ru-RU" dirty="0" smtClean="0"/>
+              <a:t>соединения</a:t>
+            </a:r>
+            <a:endParaRPr lang="en-US" dirty="0" smtClean="0"/>
+          </a:p>
+          <a:p>
+            <a:r>
+              <a:rPr lang="ru-RU" dirty="0" smtClean="0"/>
+              <a:t>Ненадежная доставка</a:t>
+            </a:r>
+          </a:p>
+          <a:p>
+            <a:r>
+              <a:rPr lang="ru-RU" dirty="0" smtClean="0"/>
+              <a:t>Без восстановления последовательности</a:t>
+            </a:r>
+          </a:p>
+          <a:p>
+            <a:r>
+              <a:rPr lang="ru-RU" dirty="0" smtClean="0"/>
+              <a:t>Без управления потоком</a:t>
+            </a:r>
+            <a:endParaRPr lang="ru-RU" dirty="0"/>
+          </a:p>
+        </p:txBody>
+      </p:sp>
+      <p:pic>
+        <p:nvPicPr>
+          <p:cNvPr id="1026" name="Picture 2" descr="Chapter 10. User Datagram Protocol (UDP) and IP Fragmentation - Shichao's  Notes"/>
+          <p:cNvPicPr>
+            <a:picLocks noGrp="1" noChangeAspect="1" noChangeArrowheads="1"/>
+          </p:cNvPicPr>
+          <p:nvPr>
+            <p:ph sz="half" idx="2"/>
+          </p:nvPr>
+        </p:nvPicPr>
+        <p:blipFill>
+          <a:blip r:embed="rId2">
+            <a:extLst>
+              <a:ext uri="{28A0092B-C50C-407E-A947-70E740481C1C}">
+                <a14:useLocalDpi xmlns:a14="http://schemas.microsoft.com/office/drawing/2010/main" val="0"/>
+              </a:ext>
+            </a:extLst>
+          </a:blip>
+          <a:srcRect/>
+          <a:stretch>
+            <a:fillRect/>
+          </a:stretch>
+        </p:blipFill>
+        <p:spPr bwMode="auto">
+          <a:xfrm>
+            <a:off x="6172200" y="2015821"/>
+            <a:ext cx="5181600" cy="3970945"/>
+          </a:xfrm>
+          <a:prstGeom prst="rect">
+            <a:avLst/>
+          </a:prstGeom>
+          <a:noFill/>
+          <a:extLst>
+            <a:ext uri="{909E8E84-426E-40DD-AFC4-6F175D3DCCD1}">
+              <a14:hiddenFill xmlns:a14="http://schemas.microsoft.com/office/drawing/2010/main">
+                <a:solidFill>
+                  <a:srgbClr val="FFFFFF"/>
+                </a:solidFill>
+              </a14:hiddenFill>
+            </a:ext>
+          </a:extLst>
+        </p:spPr>
+      </p:pic>
+    </p:spTree>
+    <p:extLst>
+      <p:ext uri="{BB962C8B-B14F-4D97-AF65-F5344CB8AC3E}">
+        <p14:creationId xmlns:p14="http://schemas.microsoft.com/office/powerpoint/2010/main" val="2711844286"/>
+      </p:ext>
+    </p:extLst>
+  </p:cSld>
+  <p:clrMapOvr>
+    <a:masterClrMapping/>
+  </p:clrMapOvr>
+</p:sld>
+</file>
+
+<file path=ppt/slides/slide6.xml><?xml version="1.0" encoding="utf-8"?>
+<p:sld xmlns:a="http://schemas.openxmlformats.org/drawingml/2006/main" xmlns:r="http://schemas.openxmlformats.org/officeDocument/2006/relationships" xmlns:p="http://schemas.openxmlformats.org/presentationml/2006/main">
+  <p:cSld>
+    <p:spTree>
+      <p:nvGrpSpPr>
+        <p:cNvPr id="1" name=""/>
+        <p:cNvGrpSpPr/>
+        <p:nvPr/>
+      </p:nvGrpSpPr>
+      <p:grpSpPr>
+        <a:xfrm>
+          <a:off x="0" y="0"/>
+          <a:ext cx="0" cy="0"/>
+          <a:chOff x="0" y="0"/>
+          <a:chExt cx="0" cy="0"/>
+        </a:xfrm>
+      </p:grpSpPr>
+      <p:sp>
+        <p:nvSpPr>
+          <p:cNvPr id="2" name="Заголовок 1"/>
+          <p:cNvSpPr>
+            <a:spLocks noGrp="1"/>
+          </p:cNvSpPr>
+          <p:nvPr>
+            <p:ph type="title"/>
+          </p:nvPr>
+        </p:nvSpPr>
+        <p:spPr/>
+        <p:txBody>
+          <a:bodyPr/>
+          <a:lstStyle/>
+          <a:p>
+            <a:r>
+              <a:rPr lang="ru-RU" b="1" dirty="0"/>
+              <a:t>Адресация портов TCP и </a:t>
+            </a:r>
+            <a:r>
+              <a:rPr lang="ru-RU" b="1" dirty="0" smtClean="0"/>
+              <a:t>UDP</a:t>
+            </a:r>
+            <a:endParaRPr lang="ru-RU" dirty="0"/>
+          </a:p>
+        </p:txBody>
+      </p:sp>
+      <p:sp>
+        <p:nvSpPr>
+          <p:cNvPr id="3" name="Объект 2"/>
+          <p:cNvSpPr>
+            <a:spLocks noGrp="1"/>
+          </p:cNvSpPr>
+          <p:nvPr>
+            <p:ph sz="half" idx="1"/>
+          </p:nvPr>
+        </p:nvSpPr>
+        <p:spPr/>
+        <p:txBody>
+          <a:bodyPr/>
+          <a:lstStyle/>
+          <a:p>
+            <a:endParaRPr lang="ru-RU"/>
+          </a:p>
+        </p:txBody>
+      </p:sp>
+      <p:sp>
+        <p:nvSpPr>
+          <p:cNvPr id="4" name="Объект 3"/>
+          <p:cNvSpPr>
+            <a:spLocks noGrp="1"/>
+          </p:cNvSpPr>
+          <p:nvPr>
+            <p:ph sz="half" idx="2"/>
+          </p:nvPr>
+        </p:nvSpPr>
+        <p:spPr/>
+        <p:txBody>
+          <a:bodyPr/>
+          <a:lstStyle/>
+          <a:p>
+            <a:endParaRPr lang="ru-RU"/>
+          </a:p>
+        </p:txBody>
+      </p:sp>
+    </p:spTree>
+    <p:extLst>
+      <p:ext uri="{BB962C8B-B14F-4D97-AF65-F5344CB8AC3E}">
+        <p14:creationId xmlns:p14="http://schemas.microsoft.com/office/powerpoint/2010/main" val="410657160"/>
       </p:ext>
     </p:extLst>
   </p:cSld>
